--- a/reports/executive_presentation_deck.pptx
+++ b/reports/executive_presentation_deck.pptx
@@ -5483,7 +5483,7 @@
               </a:defRPr>
             </a:pPr>
             <a:r>
-              <a:t>4. Inventory Velocity Acceleration: Clears stagnant stock 3x faster than standalone markdowns.</a:t>
+              <a:t>4. Inventory Velocity Acceleration: Bundles cross-sell stagnant stock by pairing it with high-frequency anchors.</a:t>
             </a:r>
           </a:p>
           <a:p>
@@ -5498,7 +5498,7 @@
               </a:defRPr>
             </a:pPr>
             <a:r>
-              <a:t>5. Holding Cost Savings: Eliminates 25% annual holding cost burden on slow-moving inventory capital.</a:t>
+              <a:t>5. Holding Cost Savings: Mitigates holding cost burden across identified dead stock SKUs.</a:t>
             </a:r>
           </a:p>
         </p:txBody>
@@ -5629,7 +5629,7 @@
               </a:defRPr>
             </a:pPr>
             <a:r>
-              <a:t>Financial Impact &amp; Margin Recovery Simulation</a:t>
+              <a:t>Financial Impact &amp; Inventory Risk Analysis</a:t>
             </a:r>
           </a:p>
         </p:txBody>
@@ -5683,7 +5683,7 @@
               </a:defRPr>
             </a:pPr>
             <a:r>
-              <a:t>Clearance Strategy Financial Comparison (Portfolio Scale)</a:t>
+              <a:t>Empirical Findings &amp; Portfolio Analytics Summary</a:t>
             </a:r>
           </a:p>
           <a:p>
@@ -5698,7 +5698,7 @@
               </a:defRPr>
             </a:pPr>
             <a:r>
-              <a:t>• Gross Margin Recovery: +$142,000 in preserved gross margin vs. standalone 50% clearance slashes.</a:t>
+              <a:t>• Catalog Risk Exposure: Identified 2,609 slow-moving C-Class SKUs (66.5% of catalog) generating only 10% of revenue.</a:t>
             </a:r>
           </a:p>
           <a:p>
@@ -5713,7 +5713,7 @@
               </a:defRPr>
             </a:pPr>
             <a:r>
-              <a:t>• Inventory Capital Unlocked: 78% of stagnant C-Class stock cleared within 45 days.</a:t>
+              <a:t>• Trapped Inventory Capital: $1.33M in capital trapped across 2,333 dead stock SKUs with GMROI &lt; 1.20x.</a:t>
             </a:r>
           </a:p>
           <a:p>
@@ -5728,7 +5728,7 @@
               </a:defRPr>
             </a:pPr>
             <a:r>
-              <a:t>• Average GMROI Improvement: GMROI index increased from 1.15 to 2.45 across targeted product categories.</a:t>
+              <a:t>• Sentiment Root Causes: 53.9% of negative reviews driven by sizing/fit flaws where price discounting is counterproductive.</a:t>
             </a:r>
           </a:p>
           <a:p>
@@ -5743,7 +5743,7 @@
               </a:defRPr>
             </a:pPr>
             <a:r>
-              <a:t>• Customer Basket Value (AOV): Average Order Value increased by +18.5% due to bundle upselling.</a:t>
+              <a:t>• High-Affinity Cross-Tier Bundles: Mined 50 bundle pairs combining anchors and slow-movers with an average Lift of 4.83x.</a:t>
             </a:r>
           </a:p>
         </p:txBody>

--- a/reports/executive_presentation_deck.pptx
+++ b/reports/executive_presentation_deck.pptx
@@ -5698,7 +5698,7 @@
               </a:defRPr>
             </a:pPr>
             <a:r>
-              <a:t>• Catalog Risk Exposure: Identified 2,609 slow-moving C-Class SKUs (66.5% of catalog) generating only 10% of revenue.</a:t>
+              <a:t>• Catalog Risk Exposure: Identified 2,609 slow-moving C-Class SKUs (66.5% of catalog) generating 10% of revenue.</a:t>
             </a:r>
           </a:p>
           <a:p>
@@ -5713,7 +5713,7 @@
               </a:defRPr>
             </a:pPr>
             <a:r>
-              <a:t>• Trapped Inventory Capital: $1.33M in capital trapped across 2,333 dead stock SKUs with GMROI &lt; 1.20x.</a:t>
+              <a:t>• Trapped Inventory Capital: $155,339 in capital trapped across 1,072 dead stock SKUs with GMROI &lt; 1.20x.</a:t>
             </a:r>
           </a:p>
           <a:p>

--- a/reports/executive_presentation_deck.pptx
+++ b/reports/executive_presentation_deck.pptx
@@ -5438,7 +5438,7 @@
               </a:defRPr>
             </a:pPr>
             <a:r>
-              <a:t>1. Standalone Clearance: Price slashed by 50%. Margin drops below unit cost + holding overhead.</a:t>
+              <a:t>1. Standalone Clearance: 50% price slash severely erodes gross margin dollars, risking cash recovery below inventory unit cost.</a:t>
             </a:r>
           </a:p>
           <a:p>
@@ -5453,7 +5453,7 @@
               </a:defRPr>
             </a:pPr>
             <a:r>
-              <a:t>2. Smart Bundle Discount: 15-20% discount applied to combined basket (Anchor + Slow Mover).</a:t>
+              <a:t>2. Smart Bundle Pricing: 15%–20% discount applied across co-purchased pair (Anchor + Slow Mover) mined via Apriori rules.</a:t>
             </a:r>
           </a:p>
           <a:p>
@@ -5468,7 +5468,7 @@
               </a:defRPr>
             </a:pPr>
             <a:r>
-              <a:t>3. Gross Margin Dollar Preservation: High margin on Anchor SKU absorbs bundle discount, protecting total dollar profitability.</a:t>
+              <a:t>3. Selective Margin Accretion: Bundles are accretive only when Anchor/Slow price ratio &lt;= 1.50 (at 20% discount); extreme price gaps destroy anchor margin.</a:t>
             </a:r>
           </a:p>
           <a:p>
@@ -5483,7 +5483,7 @@
               </a:defRPr>
             </a:pPr>
             <a:r>
-              <a:t>4. Inventory Velocity Acceleration: Bundles cross-sell stagnant stock by pairing it with high-frequency anchors.</a:t>
+              <a:t>4. Algorithmic Gatekeeper: Engine selectively approves 16 of 50 mined bundles for bundling while routing price-asymmetric pairs to targeted clearance.</a:t>
             </a:r>
           </a:p>
           <a:p>
@@ -5498,7 +5498,7 @@
               </a:defRPr>
             </a:pPr>
             <a:r>
-              <a:t>5. Holding Cost Savings: Mitigates holding cost burden across identified dead stock SKUs.</a:t>
+              <a:t>5. Working Capital Optimization: Protects high-velocity anchor margin dollars while systematically unlocking stagnant C-Class stock.</a:t>
             </a:r>
           </a:p>
         </p:txBody>

--- a/reports/executive_presentation_deck.pptx
+++ b/reports/executive_presentation_deck.pptx
@@ -4648,7 +4648,7 @@
               </a:defRPr>
             </a:pPr>
             <a:r>
-              <a:t>• Class C SKUs (Tail 10% Revenue): Slow-moving inventory representing 40%+ of total stock capital.</a:t>
+              <a:t>• Class C SKUs (Tail 10% Revenue): Slow-moving inventory representing 28.0% of total stock capital ($331,869).</a:t>
             </a:r>
           </a:p>
           <a:p>
@@ -4663,7 +4663,7 @@
               </a:defRPr>
             </a:pPr>
             <a:r>
-              <a:t>• Dead Stock Risk (GMROI &lt; 1.2): High holding cost burden eating into operating cash flow.</a:t>
+              <a:t>• Dead Stock Risk (GMROI &lt; 1.2): 1,072 SKUs locking up $155,339 in unproductive working capital.</a:t>
             </a:r>
           </a:p>
           <a:p>

--- a/reports/executive_presentation_deck.pptx
+++ b/reports/executive_presentation_deck.pptx
@@ -4648,7 +4648,7 @@
               </a:defRPr>
             </a:pPr>
             <a:r>
-              <a:t>• Class C SKUs (Tail 10% Revenue): Slow-moving inventory representing 28.0% of total stock capital ($331,869).</a:t>
+              <a:t>• Class C SKUs (Tail 10% Revenue): Slow-moving inventory representing 31.6% of total stock capital ($320,438).</a:t>
             </a:r>
           </a:p>
           <a:p>
@@ -4663,7 +4663,7 @@
               </a:defRPr>
             </a:pPr>
             <a:r>
-              <a:t>• Dead Stock Risk (GMROI &lt; 1.2): 1,072 SKUs locking up $155,339 in unproductive working capital.</a:t>
+              <a:t>• Dead Stock Risk (GMROI &lt; 1.2): 1,061 SKUs locking up $151,900 in unproductive working capital.</a:t>
             </a:r>
           </a:p>
           <a:p>
@@ -5468,7 +5468,7 @@
               </a:defRPr>
             </a:pPr>
             <a:r>
-              <a:t>3. Selective Margin Accretion: Bundles are accretive only when Anchor/Slow price ratio &lt;= 1.50 (at 20% discount); extreme price gaps destroy anchor margin.</a:t>
+              <a:t>3. Margin Protection Depends on Discount Design: a blanket bundle discount gives away anchor margin; discounting only the slow mover protects it (see scenario analysis).</a:t>
             </a:r>
           </a:p>
           <a:p>
@@ -5483,7 +5483,7 @@
               </a:defRPr>
             </a:pPr>
             <a:r>
-              <a:t>4. Algorithmic Gatekeeper: Engine selectively approves 16 of 50 mined bundles for bundling while routing price-asymmetric pairs to targeted clearance.</a:t>
+              <a:t>4. Algorithmic Gatekeeper: Engine selectively approves 15 of 52 mined bundles for blanket bundling while routing price-asymmetric pairs to targeted clearance.</a:t>
             </a:r>
           </a:p>
           <a:p>
@@ -5698,7 +5698,7 @@
               </a:defRPr>
             </a:pPr>
             <a:r>
-              <a:t>• Catalog Risk Exposure: Identified 2,609 slow-moving C-Class SKUs (66.5% of catalog) generating 10% of revenue.</a:t>
+              <a:t>• Catalog Risk Exposure: Identified 2,574 slow-moving C-Class SKUs (65.9% of catalog) generating 10% of revenue.</a:t>
             </a:r>
           </a:p>
           <a:p>
@@ -5713,7 +5713,7 @@
               </a:defRPr>
             </a:pPr>
             <a:r>
-              <a:t>• Trapped Inventory Capital: $155,339 in capital trapped across 1,072 dead stock SKUs with GMROI &lt; 1.20x.</a:t>
+              <a:t>• Trapped Inventory Capital: $151,900 (modeled) across 1,061 low-revenue-tier SKUs with GMROI &lt; 1.20x.</a:t>
             </a:r>
           </a:p>
           <a:p>
@@ -5743,7 +5743,7 @@
               </a:defRPr>
             </a:pPr>
             <a:r>
-              <a:t>• High-Affinity Cross-Tier Bundles: Mined 50 bundle pairs combining anchors and slow-movers with an average Lift of 4.83x.</a:t>
+              <a:t>• High-Affinity Cross-Tier Bundles: Mined 52 bundle pairs combining anchors and slow-movers with an average Lift of 3.93x.</a:t>
             </a:r>
           </a:p>
         </p:txBody>
